--- a/assets/pptx/catalog-547.pptx
+++ b/assets/pptx/catalog-547.pptx
@@ -3368,7 +3368,7 @@
                 <a:ea typeface="Ebrima"/>
                 <a:cs typeface="Ebrima"/>
               </a:rPr>
-              <a:t>የእኔ መድሐኒት (4x)</a:t>
+              <a:t>የእኔ መድሐኒት 4x</a:t>
             </a:r>
           </a:p>
         </p:txBody>
@@ -3646,7 +3646,7 @@
                 <a:ea typeface="Ebrima"/>
                 <a:cs typeface="Ebrima"/>
               </a:rPr>
-              <a:t>ተመስገን ብቻ (2x)</a:t>
+              <a:t>ተመስገን ብቻ 2x</a:t>
             </a:r>
           </a:p>
           <a:p>
@@ -3682,7 +3682,7 @@
                 <a:ea typeface="Ebrima"/>
                 <a:cs typeface="Ebrima"/>
               </a:rPr>
-              <a:t>ከፍ በል ብቻ (2x)</a:t>
+              <a:t>ከፍ በል ብቻ 2x</a:t>
             </a:r>
           </a:p>
           <a:p>
@@ -3718,7 +3718,7 @@
                 <a:ea typeface="Ebrima"/>
                 <a:cs typeface="Ebrima"/>
               </a:rPr>
-              <a:t>ተመስገን ብቻ (2x)</a:t>
+              <a:t>ተመስገን ብቻ 2x</a:t>
             </a:r>
           </a:p>
           <a:p>
@@ -3857,7 +3857,7 @@
                 <a:ea typeface="Ebrima"/>
                 <a:cs typeface="Ebrima"/>
               </a:rPr>
-              <a:t>ላንተ ላንተ ይህ አያንስም ወይ (2x)</a:t>
+              <a:t>ላንተ ላንተ ይህ አያንስም ወይ 2x</a:t>
             </a:r>
           </a:p>
           <a:p>
@@ -3893,7 +3893,7 @@
                 <a:ea typeface="Ebrima"/>
                 <a:cs typeface="Ebrima"/>
               </a:rPr>
-              <a:t>ላንተ ላንተ ይህ አያንስም ወይ (2x)</a:t>
+              <a:t>ላንተ ላንተ ይህ አያንስም ወይ 2x</a:t>
             </a:r>
           </a:p>
         </p:txBody>
@@ -3960,7 +3960,7 @@
                 <a:ea typeface="Ebrima"/>
                 <a:cs typeface="Ebrima"/>
               </a:rPr>
-              <a:t>ሳስበው ፍቅሩን ሳስበው (3x)</a:t>
+              <a:t>ሳስበው ፍቅሩን ሳስበው 3x</a:t>
             </a:r>
           </a:p>
           <a:p>
@@ -3978,7 +3978,7 @@
                 <a:ea typeface="Ebrima"/>
                 <a:cs typeface="Ebrima"/>
               </a:rPr>
-              <a:t>ለእግዚአብሔር ምስጋና አነሰው (3x)</a:t>
+              <a:t>ለእግዚአብሔር ምስጋና አነሰው 3x</a:t>
             </a:r>
           </a:p>
           <a:p>
@@ -3996,7 +3996,7 @@
                 <a:ea typeface="Ebrima"/>
                 <a:cs typeface="Ebrima"/>
               </a:rPr>
-              <a:t>ሳስበው ማዳኑን ሳስበው (3x)</a:t>
+              <a:t>ሳስበው ማዳኑን ሳስበው 3x</a:t>
             </a:r>
           </a:p>
           <a:p>
@@ -4014,7 +4014,7 @@
                 <a:ea typeface="Ebrima"/>
                 <a:cs typeface="Ebrima"/>
               </a:rPr>
-              <a:t>ለእግዚአብሔር ምስጋና አነሰው (3x)</a:t>
+              <a:t>ለእግዚአብሔር ምስጋና አነሰው 3x</a:t>
             </a:r>
           </a:p>
         </p:txBody>
@@ -4081,7 +4081,7 @@
                 <a:ea typeface="Ebrima"/>
                 <a:cs typeface="Ebrima"/>
               </a:rPr>
-              <a:t>አልቻልኩም ዝም ልል አልቻልኩም (2x)</a:t>
+              <a:t>አልቻልኩም ዝም ልል አልቻልኩም 2x</a:t>
             </a:r>
           </a:p>
           <a:p>
@@ -4171,7 +4171,7 @@
                 <a:ea typeface="Ebrima"/>
                 <a:cs typeface="Ebrima"/>
               </a:rPr>
-              <a:t>አልቻልኩም ዝም ልል አልቻልኩም (2x)</a:t>
+              <a:t>አልቻልኩም ዝም ልል አልቻልኩም 2x</a:t>
             </a:r>
           </a:p>
           <a:p>
